--- a/public/fun/cards/care/care-43.pptx
+++ b/public/fun/cards/care/care-43.pptx
@@ -3085,7 +3085,7 @@
     <p:bg>
       <p:bgPr>
         <a:solidFill>
-          <a:srgbClr val="422D24"/>
+          <a:srgbClr val="0E1116"/>
         </a:solidFill>
         <a:effectLst/>
       </p:bgPr>
@@ -3099,20 +3099,20 @@
       <p:grpSpPr/>
       <p:sp>
         <p:nvSpPr>
-          <p:cNvPr id="2" name="Rectangle 1"/>
+          <p:cNvPr id="2" name="Oval 1"/>
           <p:cNvSpPr/>
           <p:nvPr/>
         </p:nvSpPr>
         <p:spPr>
           <a:xfrm>
-            <a:off x="0" y="0"/>
-            <a:ext cx="3240000" cy="720000"/>
+            <a:off x="547200" y="475200"/>
+            <a:ext cx="849600" cy="849600"/>
           </a:xfrm>
-          <a:prstGeom prst="rect">
+          <a:prstGeom prst="ellipse">
             <a:avLst/>
           </a:prstGeom>
           <a:solidFill>
-            <a:srgbClr val="A7887B"/>
+            <a:srgbClr val="26292D"/>
           </a:solidFill>
           <a:ln>
             <a:noFill/>
@@ -3128,47 +3128,22 @@
       </p:sp>
       <p:sp>
         <p:nvSpPr>
-          <p:cNvPr id="3" name="Freeform 2"/>
+          <p:cNvPr id="3" name="Oval 2"/>
           <p:cNvSpPr/>
           <p:nvPr/>
         </p:nvSpPr>
         <p:spPr>
           <a:xfrm>
-            <a:off x="2726496" y="201024"/>
-            <a:ext cx="235008" cy="311040"/>
+            <a:off x="187200" y="475200"/>
+            <a:ext cx="849600" cy="849600"/>
           </a:xfrm>
-          <a:custGeom>
+          <a:prstGeom prst="ellipse">
             <a:avLst/>
-            <a:gdLst/>
-            <a:ahLst/>
-            <a:cxnLst/>
-            <a:rect l="l" t="t" r="r" b="b"/>
-            <a:pathLst>
-              <a:path w="235008" h="311040">
-                <a:moveTo>
-                  <a:pt x="0" y="34560"/>
-                </a:moveTo>
-                <a:lnTo>
-                  <a:pt x="117504" y="0"/>
-                </a:lnTo>
-                <a:lnTo>
-                  <a:pt x="235008" y="34560"/>
-                </a:lnTo>
-                <a:lnTo>
-                  <a:pt x="235008" y="165888"/>
-                </a:lnTo>
-                <a:lnTo>
-                  <a:pt x="117504" y="311040"/>
-                </a:lnTo>
-                <a:lnTo>
-                  <a:pt x="0" y="165888"/>
-                </a:lnTo>
-                <a:close/>
-              </a:path>
-            </a:pathLst>
-          </a:custGeom>
+          </a:prstGeom>
           <a:solidFill>
-            <a:srgbClr val="FFFFFF"/>
+            <a:srgbClr val="00A6A6">
+              <a:alpha val="92000"/>
+            </a:srgbClr>
           </a:solidFill>
           <a:ln>
             <a:noFill/>
@@ -3182,58 +3157,16 @@
           </a:p>
         </p:txBody>
       </p:sp>
-      <p:cxnSp>
-        <p:nvCxnSpPr>
-          <p:cNvPr id="4" name="Connector 3"/>
-          <p:cNvCxnSpPr/>
+      <p:sp>
+        <p:nvSpPr>
+          <p:cNvPr id="4" name="텍스트"/>
+          <p:cNvSpPr txBox="1"/>
           <p:nvPr/>
-        </p:nvCxnSpPr>
+        </p:nvSpPr>
         <p:spPr>
           <a:xfrm>
-            <a:off x="2795616" y="360000"/>
-            <a:ext cx="38016" cy="41472"/>
-          </a:xfrm>
-          <a:prstGeom prst="line">
-            <a:avLst/>
-          </a:prstGeom>
-          <a:ln w="24192">
-            <a:solidFill>
-              <a:srgbClr val="FFFFFF"/>
-            </a:solidFill>
-          </a:ln>
-        </p:spPr>
-      </p:cxnSp>
-      <p:cxnSp>
-        <p:nvCxnSpPr>
-          <p:cNvPr id="5" name="Connector 4"/>
-          <p:cNvCxnSpPr/>
-          <p:nvPr/>
-        </p:nvCxnSpPr>
-        <p:spPr>
-          <a:xfrm flipV="1">
-            <a:off x="2833632" y="318528"/>
-            <a:ext cx="65664" cy="82944"/>
-          </a:xfrm>
-          <a:prstGeom prst="line">
-            <a:avLst/>
-          </a:prstGeom>
-          <a:ln w="24192">
-            <a:solidFill>
-              <a:srgbClr val="FFFFFF"/>
-            </a:solidFill>
-          </a:ln>
-        </p:spPr>
-      </p:cxnSp>
-      <p:sp>
-        <p:nvSpPr>
-          <p:cNvPr id="6" name="텍스트"/>
-          <p:cNvSpPr txBox="1"/>
-          <p:nvPr/>
-        </p:nvSpPr>
-        <p:spPr>
-          <a:xfrm>
-            <a:off x="230400" y="187200"/>
-            <a:ext cx="2160000" cy="305437"/>
+            <a:off x="1692000" y="223200"/>
+            <a:ext cx="1296000" cy="133351"/>
           </a:xfrm>
           <a:prstGeom prst="rect">
             <a:avLst/>
@@ -3248,11 +3181,51 @@
           <a:p>
             <a:pPr algn="l">
               <a:lnSpc>
-                <a:spcPts val="2682"/>
+                <a:spcPts val="1015"/>
               </a:lnSpc>
             </a:pPr>
             <a:r>
-              <a:rPr sz="1850" b="1" spc="50">
+              <a:rPr sz="700" b="1" spc="200">
+                <a:solidFill>
+                  <a:srgbClr val="A3A9B5"/>
+                </a:solidFill>
+                <a:latin typeface="맑은 고딕"/>
+                <a:ea typeface="맑은 고딕"/>
+              </a:rPr>
+              <a:t>의원 · 약국 이름</a:t>
+            </a:r>
+          </a:p>
+        </p:txBody>
+      </p:sp>
+      <p:sp>
+        <p:nvSpPr>
+          <p:cNvPr id="5" name="텍스트"/>
+          <p:cNvSpPr txBox="1"/>
+          <p:nvPr/>
+        </p:nvSpPr>
+        <p:spPr>
+          <a:xfrm>
+            <a:off x="1692000" y="540000"/>
+            <a:ext cx="1368000" cy="360000"/>
+          </a:xfrm>
+          <a:prstGeom prst="rect">
+            <a:avLst/>
+          </a:prstGeom>
+          <a:noFill/>
+        </p:spPr>
+        <p:txBody>
+          <a:bodyPr wrap="square" lIns="0" rIns="0" tIns="0" bIns="0" anchor="t">
+            <a:spAutoFit/>
+          </a:bodyPr>
+          <a:lstStyle/>
+          <a:p>
+            <a:pPr algn="l">
+              <a:lnSpc>
+                <a:spcPts val="3190"/>
+              </a:lnSpc>
+            </a:pPr>
+            <a:r>
+              <a:rPr sz="2200" b="1">
                 <a:solidFill>
                   <a:srgbClr val="FFFFFF"/>
                 </a:solidFill>
@@ -3266,14 +3239,14 @@
       </p:sp>
       <p:sp>
         <p:nvSpPr>
-          <p:cNvPr id="7" name="텍스트"/>
+          <p:cNvPr id="6" name="텍스트"/>
           <p:cNvSpPr txBox="1"/>
           <p:nvPr/>
         </p:nvSpPr>
         <p:spPr>
           <a:xfrm>
-            <a:off x="230400" y="475200"/>
-            <a:ext cx="2160000" cy="122400"/>
+            <a:off x="1692000" y="943200"/>
+            <a:ext cx="1368000" cy="171451"/>
           </a:xfrm>
           <a:prstGeom prst="rect">
             <a:avLst/>
@@ -3288,13 +3261,13 @@
           <a:p>
             <a:pPr algn="l">
               <a:lnSpc>
-                <a:spcPts val="1232"/>
+                <a:spcPts val="1305"/>
               </a:lnSpc>
             </a:pPr>
             <a:r>
-              <a:rPr sz="850" b="1">
+              <a:rPr sz="900" b="0">
                 <a:solidFill>
-                  <a:srgbClr val="FFFFFF"/>
+                  <a:srgbClr val="A3A9B5"/>
                 </a:solidFill>
                 <a:latin typeface="맑은 고딕"/>
                 <a:ea typeface="맑은 고딕"/>
@@ -3306,14 +3279,43 @@
       </p:sp>
       <p:sp>
         <p:nvSpPr>
+          <p:cNvPr id="7" name="Rectangle 6"/>
+          <p:cNvSpPr/>
+          <p:nvPr/>
+        </p:nvSpPr>
+        <p:spPr>
+          <a:xfrm>
+            <a:off x="1692000" y="1195200"/>
+            <a:ext cx="144000" cy="18000"/>
+          </a:xfrm>
+          <a:prstGeom prst="rect">
+            <a:avLst/>
+          </a:prstGeom>
+          <a:solidFill>
+            <a:srgbClr val="00A6A6"/>
+          </a:solidFill>
+          <a:ln>
+            <a:noFill/>
+          </a:ln>
+        </p:spPr>
+        <p:txBody>
+          <a:bodyPr rtlCol="0" anchor="ctr"/>
+          <a:lstStyle/>
+          <a:p>
+            <a:pPr algn="ctr"/>
+          </a:p>
+        </p:txBody>
+      </p:sp>
+      <p:sp>
+        <p:nvSpPr>
           <p:cNvPr id="8" name="텍스트"/>
           <p:cNvSpPr txBox="1"/>
           <p:nvPr/>
         </p:nvSpPr>
         <p:spPr>
           <a:xfrm>
-            <a:off x="230400" y="835200"/>
-            <a:ext cx="1800000" cy="100800"/>
+            <a:off x="1692000" y="1328400"/>
+            <a:ext cx="331200" cy="99061"/>
           </a:xfrm>
           <a:prstGeom prst="rect">
             <a:avLst/>
@@ -3328,18 +3330,18 @@
           <a:p>
             <a:pPr algn="l">
               <a:lnSpc>
-                <a:spcPts val="1087"/>
+                <a:spcPts val="754"/>
               </a:lnSpc>
             </a:pPr>
             <a:r>
-              <a:rPr sz="750" b="1" spc="150">
+              <a:rPr sz="520" b="1" spc="120">
                 <a:solidFill>
-                  <a:srgbClr val="BDB6B2"/>
+                  <a:srgbClr val="A3A9B5"/>
                 </a:solidFill>
                 <a:latin typeface="맑은 고딕"/>
                 <a:ea typeface="맑은 고딕"/>
               </a:rPr>
-              <a:t>의원 · 약국 이름</a:t>
+              <a:t>TEL</a:t>
             </a:r>
           </a:p>
         </p:txBody>
@@ -3352,8 +3354,8 @@
         </p:nvSpPr>
         <p:spPr>
           <a:xfrm>
-            <a:off x="230400" y="1015200"/>
-            <a:ext cx="122400" cy="168911"/>
+            <a:off x="2023200" y="1317600"/>
+            <a:ext cx="1188000" cy="125731"/>
           </a:xfrm>
           <a:prstGeom prst="rect">
             <a:avLst/>
@@ -3368,51 +3370,11 @@
           <a:p>
             <a:pPr algn="l">
               <a:lnSpc>
-                <a:spcPts val="1015"/>
+                <a:spcPts val="956"/>
               </a:lnSpc>
             </a:pPr>
             <a:r>
-              <a:rPr sz="700" b="1">
-                <a:solidFill>
-                  <a:srgbClr val="B09488"/>
-                </a:solidFill>
-                <a:latin typeface="맑은 고딕"/>
-                <a:ea typeface="맑은 고딕"/>
-              </a:rPr>
-              <a:t>T</a:t>
-            </a:r>
-          </a:p>
-        </p:txBody>
-      </p:sp>
-      <p:sp>
-        <p:nvSpPr>
-          <p:cNvPr id="10" name="텍스트"/>
-          <p:cNvSpPr txBox="1"/>
-          <p:nvPr/>
-        </p:nvSpPr>
-        <p:spPr>
-          <a:xfrm>
-            <a:off x="374400" y="1015200"/>
-            <a:ext cx="1872000" cy="168911"/>
-          </a:xfrm>
-          <a:prstGeom prst="rect">
-            <a:avLst/>
-          </a:prstGeom>
-          <a:noFill/>
-        </p:spPr>
-        <p:txBody>
-          <a:bodyPr wrap="square" lIns="0" rIns="0" tIns="0" bIns="0" anchor="t">
-            <a:spAutoFit/>
-          </a:bodyPr>
-          <a:lstStyle/>
-          <a:p>
-            <a:pPr algn="l">
-              <a:lnSpc>
-                <a:spcPts val="1015"/>
-              </a:lnSpc>
-            </a:pPr>
-            <a:r>
-              <a:rPr sz="700" b="0">
+              <a:rPr sz="660" b="0">
                 <a:solidFill>
                   <a:srgbClr val="FFFFFF"/>
                 </a:solidFill>
@@ -3426,14 +3388,14 @@
       </p:sp>
       <p:sp>
         <p:nvSpPr>
-          <p:cNvPr id="11" name="텍스트"/>
+          <p:cNvPr id="10" name="텍스트"/>
           <p:cNvSpPr txBox="1"/>
           <p:nvPr/>
         </p:nvSpPr>
         <p:spPr>
           <a:xfrm>
-            <a:off x="230400" y="1184111"/>
-            <a:ext cx="122400" cy="168911"/>
+            <a:off x="1692000" y="1458000"/>
+            <a:ext cx="331200" cy="99061"/>
           </a:xfrm>
           <a:prstGeom prst="rect">
             <a:avLst/>
@@ -3448,32 +3410,32 @@
           <a:p>
             <a:pPr algn="l">
               <a:lnSpc>
-                <a:spcPts val="1015"/>
+                <a:spcPts val="754"/>
               </a:lnSpc>
             </a:pPr>
             <a:r>
-              <a:rPr sz="700" b="1">
+              <a:rPr sz="520" b="1" spc="120">
                 <a:solidFill>
-                  <a:srgbClr val="B09488"/>
+                  <a:srgbClr val="A3A9B5"/>
                 </a:solidFill>
                 <a:latin typeface="맑은 고딕"/>
                 <a:ea typeface="맑은 고딕"/>
               </a:rPr>
-              <a:t>E</a:t>
-            </a:r>
-          </a:p>
-        </p:txBody>
-      </p:sp>
-      <p:sp>
-        <p:nvSpPr>
-          <p:cNvPr id="12" name="텍스트"/>
+              <a:t>MAIL</a:t>
+            </a:r>
+          </a:p>
+        </p:txBody>
+      </p:sp>
+      <p:sp>
+        <p:nvSpPr>
+          <p:cNvPr id="11" name="텍스트"/>
           <p:cNvSpPr txBox="1"/>
           <p:nvPr/>
         </p:nvSpPr>
         <p:spPr>
           <a:xfrm>
-            <a:off x="374400" y="1184111"/>
-            <a:ext cx="1872000" cy="168911"/>
+            <a:off x="2023200" y="1447200"/>
+            <a:ext cx="1188000" cy="125731"/>
           </a:xfrm>
           <a:prstGeom prst="rect">
             <a:avLst/>
@@ -3488,11 +3450,11 @@
           <a:p>
             <a:pPr algn="l">
               <a:lnSpc>
-                <a:spcPts val="1015"/>
+                <a:spcPts val="956"/>
               </a:lnSpc>
             </a:pPr>
             <a:r>
-              <a:rPr sz="700" b="0">
+              <a:rPr sz="660" b="0">
                 <a:solidFill>
                   <a:srgbClr val="FFFFFF"/>
                 </a:solidFill>
@@ -3506,14 +3468,14 @@
       </p:sp>
       <p:sp>
         <p:nvSpPr>
-          <p:cNvPr id="13" name="텍스트"/>
+          <p:cNvPr id="12" name="텍스트"/>
           <p:cNvSpPr txBox="1"/>
           <p:nvPr/>
         </p:nvSpPr>
         <p:spPr>
           <a:xfrm>
-            <a:off x="230400" y="1353022"/>
-            <a:ext cx="122400" cy="168911"/>
+            <a:off x="1692000" y="1587600"/>
+            <a:ext cx="331200" cy="99061"/>
           </a:xfrm>
           <a:prstGeom prst="rect">
             <a:avLst/>
@@ -3528,32 +3490,32 @@
           <a:p>
             <a:pPr algn="l">
               <a:lnSpc>
-                <a:spcPts val="1015"/>
+                <a:spcPts val="754"/>
               </a:lnSpc>
             </a:pPr>
             <a:r>
-              <a:rPr sz="700" b="1">
+              <a:rPr sz="520" b="1" spc="120">
                 <a:solidFill>
-                  <a:srgbClr val="B09488"/>
+                  <a:srgbClr val="A3A9B5"/>
                 </a:solidFill>
                 <a:latin typeface="맑은 고딕"/>
                 <a:ea typeface="맑은 고딕"/>
               </a:rPr>
-              <a:t>A</a:t>
-            </a:r>
-          </a:p>
-        </p:txBody>
-      </p:sp>
-      <p:sp>
-        <p:nvSpPr>
-          <p:cNvPr id="14" name="텍스트"/>
+              <a:t>ADDR</a:t>
+            </a:r>
+          </a:p>
+        </p:txBody>
+      </p:sp>
+      <p:sp>
+        <p:nvSpPr>
+          <p:cNvPr id="13" name="텍스트"/>
           <p:cNvSpPr txBox="1"/>
           <p:nvPr/>
         </p:nvSpPr>
         <p:spPr>
           <a:xfrm>
-            <a:off x="374400" y="1353022"/>
-            <a:ext cx="1872000" cy="168911"/>
+            <a:off x="2023200" y="1576800"/>
+            <a:ext cx="1188000" cy="125731"/>
           </a:xfrm>
           <a:prstGeom prst="rect">
             <a:avLst/>
@@ -3568,11 +3530,11 @@
           <a:p>
             <a:pPr algn="l">
               <a:lnSpc>
-                <a:spcPts val="1015"/>
+                <a:spcPts val="956"/>
               </a:lnSpc>
             </a:pPr>
             <a:r>
-              <a:rPr sz="700" b="0">
+              <a:rPr sz="660" b="0">
                 <a:solidFill>
                   <a:srgbClr val="FFFFFF"/>
                 </a:solidFill>
@@ -3598,7 +3560,7 @@
     <p:bg>
       <p:bgPr>
         <a:solidFill>
-          <a:srgbClr val="FBF8F2"/>
+          <a:srgbClr val="F3F4F6"/>
         </a:solidFill>
         <a:effectLst/>
       </p:bgPr>
@@ -3612,86 +3574,81 @@
       <p:grpSpPr/>
       <p:sp>
         <p:nvSpPr>
-          <p:cNvPr id="2" name="Rectangle 1"/>
-          <p:cNvSpPr/>
+          <p:cNvPr id="2" name="텍스트"/>
+          <p:cNvSpPr txBox="1"/>
           <p:nvPr/>
         </p:nvSpPr>
         <p:spPr>
           <a:xfrm>
-            <a:off x="0" y="0"/>
-            <a:ext cx="1224000" cy="1800000"/>
+            <a:off x="216000" y="72000"/>
+            <a:ext cx="1080000" cy="936000"/>
           </a:xfrm>
           <a:prstGeom prst="rect">
             <a:avLst/>
           </a:prstGeom>
-          <a:solidFill>
-            <a:srgbClr val="478578"/>
-          </a:solidFill>
-          <a:ln>
-            <a:noFill/>
-          </a:ln>
+          <a:noFill/>
         </p:spPr>
         <p:txBody>
-          <a:bodyPr rtlCol="0" anchor="ctr"/>
-          <a:lstStyle/>
-          <a:p>
-            <a:pPr algn="ctr"/>
-          </a:p>
-        </p:txBody>
-      </p:sp>
-      <p:sp>
-        <p:nvSpPr>
-          <p:cNvPr id="3" name="Freeform 2"/>
-          <p:cNvSpPr/>
+          <a:bodyPr wrap="square" lIns="0" rIns="0" tIns="0" bIns="0" anchor="t">
+            <a:spAutoFit/>
+          </a:bodyPr>
+          <a:lstStyle/>
+          <a:p>
+            <a:pPr algn="l">
+              <a:lnSpc>
+                <a:spcPts val="15950"/>
+              </a:lnSpc>
+            </a:pPr>
+            <a:r>
+              <a:rPr sz="11000" b="1">
+                <a:solidFill>
+                  <a:srgbClr val="00A6A6"/>
+                </a:solidFill>
+                <a:latin typeface="맑은 고딕"/>
+                <a:ea typeface="맑은 고딕"/>
+              </a:rPr>
+              <a:t>“</a:t>
+            </a:r>
+          </a:p>
+        </p:txBody>
+      </p:sp>
+      <p:sp>
+        <p:nvSpPr>
+          <p:cNvPr id="3" name="텍스트"/>
+          <p:cNvSpPr txBox="1"/>
           <p:nvPr/>
         </p:nvSpPr>
         <p:spPr>
           <a:xfrm>
-            <a:off x="428400" y="651600"/>
-            <a:ext cx="367200" cy="486000"/>
+            <a:off x="252000" y="792000"/>
+            <a:ext cx="2520000" cy="648000"/>
           </a:xfrm>
-          <a:custGeom>
+          <a:prstGeom prst="rect">
             <a:avLst/>
-            <a:gdLst/>
-            <a:ahLst/>
-            <a:cxnLst/>
-            <a:rect l="l" t="t" r="r" b="b"/>
-            <a:pathLst>
-              <a:path w="367200" h="486000">
-                <a:moveTo>
-                  <a:pt x="0" y="54000"/>
-                </a:moveTo>
-                <a:lnTo>
-                  <a:pt x="183600" y="0"/>
-                </a:lnTo>
-                <a:lnTo>
-                  <a:pt x="367200" y="54000"/>
-                </a:lnTo>
-                <a:lnTo>
-                  <a:pt x="367200" y="259200"/>
-                </a:lnTo>
-                <a:lnTo>
-                  <a:pt x="183600" y="486000"/>
-                </a:lnTo>
-                <a:lnTo>
-                  <a:pt x="0" y="259200"/>
-                </a:lnTo>
-                <a:close/>
-              </a:path>
-            </a:pathLst>
-          </a:custGeom>
-          <a:solidFill>
-            <a:srgbClr val="FFFFFF"/>
-          </a:solidFill>
-          <a:ln>
-            <a:noFill/>
-          </a:ln>
+          </a:prstGeom>
+          <a:noFill/>
         </p:spPr>
         <p:txBody>
-          <a:bodyPr rtlCol="0" anchor="ctr"/>
-          <a:lstStyle/>
-          <a:p>
-            <a:pPr algn="ctr"/>
+          <a:bodyPr wrap="square" lIns="0" rIns="0" tIns="0" bIns="0" anchor="t">
+            <a:spAutoFit/>
+          </a:bodyPr>
+          <a:lstStyle/>
+          <a:p>
+            <a:pPr algn="l">
+              <a:lnSpc>
+                <a:spcPts val="1812"/>
+              </a:lnSpc>
+            </a:pPr>
+            <a:r>
+              <a:rPr sz="1250" b="1">
+                <a:solidFill>
+                  <a:srgbClr val="12151C"/>
+                </a:solidFill>
+                <a:latin typeface="맑은 고딕"/>
+                <a:ea typeface="맑은 고딕"/>
+              </a:rPr>
+              <a:t>함께 걷는 건강한 길</a:t>
+            </a:r>
           </a:p>
         </p:txBody>
       </p:sp>
@@ -3703,50 +3660,29 @@
         </p:nvCxnSpPr>
         <p:spPr>
           <a:xfrm>
-            <a:off x="536400" y="900000"/>
-            <a:ext cx="59400" cy="64800"/>
+            <a:off x="252000" y="1512000"/>
+            <a:ext cx="2736000" cy="0"/>
           </a:xfrm>
           <a:prstGeom prst="line">
             <a:avLst/>
           </a:prstGeom>
-          <a:ln w="37800">
+          <a:ln w="5760">
             <a:solidFill>
-              <a:srgbClr val="737373"/>
+              <a:srgbClr val="DCDFE4"/>
             </a:solidFill>
           </a:ln>
         </p:spPr>
       </p:cxnSp>
-      <p:cxnSp>
-        <p:nvCxnSpPr>
-          <p:cNvPr id="5" name="Connector 4"/>
-          <p:cNvCxnSpPr/>
-          <p:nvPr/>
-        </p:nvCxnSpPr>
-        <p:spPr>
-          <a:xfrm flipV="1">
-            <a:off x="595800" y="835200"/>
-            <a:ext cx="102600" cy="129600"/>
-          </a:xfrm>
-          <a:prstGeom prst="line">
-            <a:avLst/>
-          </a:prstGeom>
-          <a:ln w="37800">
-            <a:solidFill>
-              <a:srgbClr val="737373"/>
-            </a:solidFill>
-          </a:ln>
-        </p:spPr>
-      </p:cxnSp>
-      <p:sp>
-        <p:nvSpPr>
-          <p:cNvPr id="6" name="텍스트"/>
+      <p:sp>
+        <p:nvSpPr>
+          <p:cNvPr id="5" name="텍스트"/>
           <p:cNvSpPr txBox="1"/>
           <p:nvPr/>
         </p:nvSpPr>
         <p:spPr>
           <a:xfrm>
-            <a:off x="1440000" y="432000"/>
-            <a:ext cx="1584000" cy="792000"/>
+            <a:off x="252000" y="1569600"/>
+            <a:ext cx="2736000" cy="123826"/>
           </a:xfrm>
           <a:prstGeom prst="rect">
             <a:avLst/>
@@ -3754,89 +3690,20 @@
           <a:noFill/>
         </p:spPr>
         <p:txBody>
-          <a:bodyPr wrap="square" lIns="0" rIns="0" tIns="0" bIns="0" anchor="ctr">
-            <a:spAutoFit/>
-          </a:bodyPr>
-          <a:lstStyle/>
-          <a:p>
-            <a:pPr algn="l">
-              <a:lnSpc>
-                <a:spcPts val="1667"/>
-              </a:lnSpc>
-            </a:pPr>
-            <a:r>
-              <a:rPr sz="1150" b="1">
-                <a:solidFill>
-                  <a:srgbClr val="422D24"/>
-                </a:solidFill>
-                <a:latin typeface="맑은 고딕"/>
-                <a:ea typeface="맑은 고딕"/>
-              </a:rPr>
-              <a:t>함께 걷는 건강한 길</a:t>
-            </a:r>
-          </a:p>
-        </p:txBody>
-      </p:sp>
-      <p:sp>
-        <p:nvSpPr>
-          <p:cNvPr id="7" name="Rectangle 6"/>
-          <p:cNvSpPr/>
-          <p:nvPr/>
-        </p:nvSpPr>
-        <p:spPr>
-          <a:xfrm>
-            <a:off x="1440000" y="1317600"/>
-            <a:ext cx="180000" cy="10800"/>
-          </a:xfrm>
-          <a:prstGeom prst="rect">
-            <a:avLst/>
-          </a:prstGeom>
-          <a:solidFill>
-            <a:srgbClr val="478578"/>
-          </a:solidFill>
-          <a:ln>
-            <a:noFill/>
-          </a:ln>
-        </p:spPr>
-        <p:txBody>
-          <a:bodyPr rtlCol="0" anchor="ctr"/>
-          <a:lstStyle/>
-          <a:p>
-            <a:pPr algn="ctr"/>
-          </a:p>
-        </p:txBody>
-      </p:sp>
-      <p:sp>
-        <p:nvSpPr>
-          <p:cNvPr id="8" name="텍스트"/>
-          <p:cNvSpPr txBox="1"/>
-          <p:nvPr/>
-        </p:nvSpPr>
-        <p:spPr>
-          <a:xfrm>
-            <a:off x="1440000" y="1418400"/>
-            <a:ext cx="1584000" cy="108000"/>
-          </a:xfrm>
-          <a:prstGeom prst="rect">
-            <a:avLst/>
-          </a:prstGeom>
-          <a:noFill/>
-        </p:spPr>
-        <p:txBody>
           <a:bodyPr wrap="square" lIns="0" rIns="0" tIns="0" bIns="0" anchor="t">
             <a:spAutoFit/>
           </a:bodyPr>
           <a:lstStyle/>
           <a:p>
-            <a:pPr algn="l">
+            <a:pPr algn="r">
               <a:lnSpc>
-                <a:spcPts val="1087"/>
+                <a:spcPts val="942"/>
               </a:lnSpc>
             </a:pPr>
             <a:r>
-              <a:rPr sz="750" b="1" spc="200">
+              <a:rPr sz="650" b="1" spc="200">
                 <a:solidFill>
-                  <a:srgbClr val="7C6E67"/>
+                  <a:srgbClr val="6B7280"/>
                 </a:solidFill>
                 <a:latin typeface="맑은 고딕"/>
                 <a:ea typeface="맑은 고딕"/>

--- a/public/fun/cards/care/care-43.pptx
+++ b/public/fun/cards/care/care-43.pptx
@@ -3097,196 +3097,37 @@
         <p:nvPr/>
       </p:nvGrpSpPr>
       <p:grpSpPr/>
-      <p:sp>
-        <p:nvSpPr>
-          <p:cNvPr id="2" name="Oval 1"/>
+      <p:cxnSp>
+        <p:nvCxnSpPr>
+          <p:cNvPr id="2" name="Connector 1"/>
+          <p:cNvCxnSpPr/>
+          <p:nvPr/>
+        </p:nvCxnSpPr>
+        <p:spPr>
+          <a:xfrm>
+            <a:off x="1080000" y="252000"/>
+            <a:ext cx="0" cy="1296000"/>
+          </a:xfrm>
+          <a:prstGeom prst="line">
+            <a:avLst/>
+          </a:prstGeom>
+          <a:ln w="3600">
+            <a:solidFill>
+              <a:srgbClr val="2A2F38"/>
+            </a:solidFill>
+          </a:ln>
+        </p:spPr>
+      </p:cxnSp>
+      <p:sp>
+        <p:nvSpPr>
+          <p:cNvPr id="3" name="Rectangle 2"/>
           <p:cNvSpPr/>
           <p:nvPr/>
         </p:nvSpPr>
         <p:spPr>
           <a:xfrm>
-            <a:off x="547200" y="475200"/>
-            <a:ext cx="849600" cy="849600"/>
-          </a:xfrm>
-          <a:prstGeom prst="ellipse">
-            <a:avLst/>
-          </a:prstGeom>
-          <a:solidFill>
-            <a:srgbClr val="26292D"/>
-          </a:solidFill>
-          <a:ln>
-            <a:noFill/>
-          </a:ln>
-        </p:spPr>
-        <p:txBody>
-          <a:bodyPr rtlCol="0" anchor="ctr"/>
-          <a:lstStyle/>
-          <a:p>
-            <a:pPr algn="ctr"/>
-          </a:p>
-        </p:txBody>
-      </p:sp>
-      <p:sp>
-        <p:nvSpPr>
-          <p:cNvPr id="3" name="Oval 2"/>
-          <p:cNvSpPr/>
-          <p:nvPr/>
-        </p:nvSpPr>
-        <p:spPr>
-          <a:xfrm>
-            <a:off x="187200" y="475200"/>
-            <a:ext cx="849600" cy="849600"/>
-          </a:xfrm>
-          <a:prstGeom prst="ellipse">
-            <a:avLst/>
-          </a:prstGeom>
-          <a:solidFill>
-            <a:srgbClr val="00A6A6">
-              <a:alpha val="92000"/>
-            </a:srgbClr>
-          </a:solidFill>
-          <a:ln>
-            <a:noFill/>
-          </a:ln>
-        </p:spPr>
-        <p:txBody>
-          <a:bodyPr rtlCol="0" anchor="ctr"/>
-          <a:lstStyle/>
-          <a:p>
-            <a:pPr algn="ctr"/>
-          </a:p>
-        </p:txBody>
-      </p:sp>
-      <p:sp>
-        <p:nvSpPr>
-          <p:cNvPr id="4" name="텍스트"/>
-          <p:cNvSpPr txBox="1"/>
-          <p:nvPr/>
-        </p:nvSpPr>
-        <p:spPr>
-          <a:xfrm>
-            <a:off x="1692000" y="223200"/>
-            <a:ext cx="1296000" cy="133351"/>
-          </a:xfrm>
-          <a:prstGeom prst="rect">
-            <a:avLst/>
-          </a:prstGeom>
-          <a:noFill/>
-        </p:spPr>
-        <p:txBody>
-          <a:bodyPr wrap="square" lIns="0" rIns="0" tIns="0" bIns="0" anchor="t">
-            <a:spAutoFit/>
-          </a:bodyPr>
-          <a:lstStyle/>
-          <a:p>
-            <a:pPr algn="l">
-              <a:lnSpc>
-                <a:spcPts val="1015"/>
-              </a:lnSpc>
-            </a:pPr>
-            <a:r>
-              <a:rPr sz="700" b="1" spc="200">
-                <a:solidFill>
-                  <a:srgbClr val="A3A9B5"/>
-                </a:solidFill>
-                <a:latin typeface="맑은 고딕"/>
-                <a:ea typeface="맑은 고딕"/>
-              </a:rPr>
-              <a:t>의원 · 약국 이름</a:t>
-            </a:r>
-          </a:p>
-        </p:txBody>
-      </p:sp>
-      <p:sp>
-        <p:nvSpPr>
-          <p:cNvPr id="5" name="텍스트"/>
-          <p:cNvSpPr txBox="1"/>
-          <p:nvPr/>
-        </p:nvSpPr>
-        <p:spPr>
-          <a:xfrm>
-            <a:off x="1692000" y="540000"/>
-            <a:ext cx="1368000" cy="360000"/>
-          </a:xfrm>
-          <a:prstGeom prst="rect">
-            <a:avLst/>
-          </a:prstGeom>
-          <a:noFill/>
-        </p:spPr>
-        <p:txBody>
-          <a:bodyPr wrap="square" lIns="0" rIns="0" tIns="0" bIns="0" anchor="t">
-            <a:spAutoFit/>
-          </a:bodyPr>
-          <a:lstStyle/>
-          <a:p>
-            <a:pPr algn="l">
-              <a:lnSpc>
-                <a:spcPts val="3190"/>
-              </a:lnSpc>
-            </a:pPr>
-            <a:r>
-              <a:rPr sz="2200" b="1">
-                <a:solidFill>
-                  <a:srgbClr val="FFFFFF"/>
-                </a:solidFill>
-                <a:latin typeface="맑은 고딕"/>
-                <a:ea typeface="맑은 고딕"/>
-              </a:rPr>
-              <a:t>소하영</a:t>
-            </a:r>
-          </a:p>
-        </p:txBody>
-      </p:sp>
-      <p:sp>
-        <p:nvSpPr>
-          <p:cNvPr id="6" name="텍스트"/>
-          <p:cNvSpPr txBox="1"/>
-          <p:nvPr/>
-        </p:nvSpPr>
-        <p:spPr>
-          <a:xfrm>
-            <a:off x="1692000" y="943200"/>
-            <a:ext cx="1368000" cy="171451"/>
-          </a:xfrm>
-          <a:prstGeom prst="rect">
-            <a:avLst/>
-          </a:prstGeom>
-          <a:noFill/>
-        </p:spPr>
-        <p:txBody>
-          <a:bodyPr wrap="square" lIns="0" rIns="0" tIns="0" bIns="0" anchor="t">
-            <a:spAutoFit/>
-          </a:bodyPr>
-          <a:lstStyle/>
-          <a:p>
-            <a:pPr algn="l">
-              <a:lnSpc>
-                <a:spcPts val="1305"/>
-              </a:lnSpc>
-            </a:pPr>
-            <a:r>
-              <a:rPr sz="900" b="0">
-                <a:solidFill>
-                  <a:srgbClr val="A3A9B5"/>
-                </a:solidFill>
-                <a:latin typeface="맑은 고딕"/>
-                <a:ea typeface="맑은 고딕"/>
-              </a:rPr>
-              <a:t>간호사</a:t>
-            </a:r>
-          </a:p>
-        </p:txBody>
-      </p:sp>
-      <p:sp>
-        <p:nvSpPr>
-          <p:cNvPr id="7" name="Rectangle 6"/>
-          <p:cNvSpPr/>
-          <p:nvPr/>
-        </p:nvSpPr>
-        <p:spPr>
-          <a:xfrm>
-            <a:off x="1692000" y="1195200"/>
-            <a:ext cx="144000" cy="18000"/>
+            <a:off x="1069200" y="252000"/>
+            <a:ext cx="21600" cy="201600"/>
           </a:xfrm>
           <a:prstGeom prst="rect">
             <a:avLst/>
@@ -3308,14 +3149,14 @@
       </p:sp>
       <p:sp>
         <p:nvSpPr>
-          <p:cNvPr id="8" name="텍스트"/>
+          <p:cNvPr id="4" name="텍스트"/>
           <p:cNvSpPr txBox="1"/>
           <p:nvPr/>
         </p:nvSpPr>
         <p:spPr>
           <a:xfrm>
-            <a:off x="1692000" y="1328400"/>
-            <a:ext cx="331200" cy="99061"/>
+            <a:off x="252000" y="252000"/>
+            <a:ext cx="756000" cy="123826"/>
           </a:xfrm>
           <a:prstGeom prst="rect">
             <a:avLst/>
@@ -3330,11 +3171,221 @@
           <a:p>
             <a:pPr algn="l">
               <a:lnSpc>
-                <a:spcPts val="754"/>
+                <a:spcPts val="942"/>
               </a:lnSpc>
             </a:pPr>
             <a:r>
-              <a:rPr sz="520" b="1" spc="120">
+              <a:rPr sz="650" b="1" spc="220">
+                <a:solidFill>
+                  <a:srgbClr val="A3A9B5"/>
+                </a:solidFill>
+                <a:latin typeface="맑은 고딕"/>
+                <a:ea typeface="맑은 고딕"/>
+              </a:rPr>
+              <a:t>의원 · 약국 이름</a:t>
+            </a:r>
+          </a:p>
+        </p:txBody>
+      </p:sp>
+      <p:sp>
+        <p:nvSpPr>
+          <p:cNvPr id="5" name="Oval 4"/>
+          <p:cNvSpPr/>
+          <p:nvPr/>
+        </p:nvSpPr>
+        <p:spPr>
+          <a:xfrm>
+            <a:off x="273600" y="734400"/>
+            <a:ext cx="244800" cy="244800"/>
+          </a:xfrm>
+          <a:prstGeom prst="ellipse">
+            <a:avLst/>
+          </a:prstGeom>
+          <a:noFill/>
+          <a:ln w="5040">
+            <a:solidFill>
+              <a:srgbClr val="00A6A6"/>
+            </a:solidFill>
+          </a:ln>
+        </p:spPr>
+        <p:txBody>
+          <a:bodyPr rtlCol="0" anchor="ctr"/>
+          <a:lstStyle/>
+          <a:p>
+            <a:pPr algn="ctr"/>
+          </a:p>
+        </p:txBody>
+      </p:sp>
+      <p:sp>
+        <p:nvSpPr>
+          <p:cNvPr id="6" name="텍스트"/>
+          <p:cNvSpPr txBox="1"/>
+          <p:nvPr/>
+        </p:nvSpPr>
+        <p:spPr>
+          <a:xfrm>
+            <a:off x="252000" y="734400"/>
+            <a:ext cx="288000" cy="252000"/>
+          </a:xfrm>
+          <a:prstGeom prst="rect">
+            <a:avLst/>
+          </a:prstGeom>
+          <a:noFill/>
+        </p:spPr>
+        <p:txBody>
+          <a:bodyPr wrap="square" lIns="0" rIns="0" tIns="0" bIns="0" anchor="ctr">
+            <a:spAutoFit/>
+          </a:bodyPr>
+          <a:lstStyle/>
+          <a:p>
+            <a:pPr algn="ctr">
+              <a:lnSpc>
+                <a:spcPts val="1305"/>
+              </a:lnSpc>
+            </a:pPr>
+            <a:r>
+              <a:rPr sz="900" b="1">
+                <a:solidFill>
+                  <a:srgbClr val="00A6A6"/>
+                </a:solidFill>
+                <a:latin typeface="맑은 고딕"/>
+                <a:ea typeface="맑은 고딕"/>
+              </a:rPr>
+              <a:t>의</a:t>
+            </a:r>
+          </a:p>
+        </p:txBody>
+      </p:sp>
+      <p:sp>
+        <p:nvSpPr>
+          <p:cNvPr id="7" name="텍스트"/>
+          <p:cNvSpPr txBox="1"/>
+          <p:nvPr/>
+        </p:nvSpPr>
+        <p:spPr>
+          <a:xfrm>
+            <a:off x="1260000" y="432000"/>
+            <a:ext cx="1800000" cy="237600"/>
+          </a:xfrm>
+          <a:prstGeom prst="rect">
+            <a:avLst/>
+          </a:prstGeom>
+          <a:noFill/>
+        </p:spPr>
+        <p:txBody>
+          <a:bodyPr wrap="square" lIns="0" rIns="0" tIns="0" bIns="0" anchor="t">
+            <a:spAutoFit/>
+          </a:bodyPr>
+          <a:lstStyle/>
+          <a:p>
+            <a:pPr algn="l">
+              <a:lnSpc>
+                <a:spcPts val="1957"/>
+              </a:lnSpc>
+            </a:pPr>
+            <a:r>
+              <a:rPr sz="1350" b="1" spc="120">
+                <a:solidFill>
+                  <a:srgbClr val="FFFFFF"/>
+                </a:solidFill>
+                <a:latin typeface="맑은 고딕"/>
+                <a:ea typeface="맑은 고딕"/>
+              </a:rPr>
+              <a:t>소하영</a:t>
+            </a:r>
+          </a:p>
+        </p:txBody>
+      </p:sp>
+      <p:sp>
+        <p:nvSpPr>
+          <p:cNvPr id="8" name="텍스트"/>
+          <p:cNvSpPr txBox="1"/>
+          <p:nvPr/>
+        </p:nvSpPr>
+        <p:spPr>
+          <a:xfrm>
+            <a:off x="1260000" y="684000"/>
+            <a:ext cx="1800000" cy="133351"/>
+          </a:xfrm>
+          <a:prstGeom prst="rect">
+            <a:avLst/>
+          </a:prstGeom>
+          <a:noFill/>
+        </p:spPr>
+        <p:txBody>
+          <a:bodyPr wrap="square" lIns="0" rIns="0" tIns="0" bIns="0" anchor="t">
+            <a:spAutoFit/>
+          </a:bodyPr>
+          <a:lstStyle/>
+          <a:p>
+            <a:pPr algn="l">
+              <a:lnSpc>
+                <a:spcPts val="1015"/>
+              </a:lnSpc>
+            </a:pPr>
+            <a:r>
+              <a:rPr sz="700" b="0" spc="60">
+                <a:solidFill>
+                  <a:srgbClr val="A3A9B5"/>
+                </a:solidFill>
+                <a:latin typeface="맑은 고딕"/>
+                <a:ea typeface="맑은 고딕"/>
+              </a:rPr>
+              <a:t>간호사</a:t>
+            </a:r>
+          </a:p>
+        </p:txBody>
+      </p:sp>
+      <p:cxnSp>
+        <p:nvCxnSpPr>
+          <p:cNvPr id="9" name="Connector 8"/>
+          <p:cNvCxnSpPr/>
+          <p:nvPr/>
+        </p:nvCxnSpPr>
+        <p:spPr>
+          <a:xfrm>
+            <a:off x="1260000" y="943200"/>
+            <a:ext cx="1728000" cy="0"/>
+          </a:xfrm>
+          <a:prstGeom prst="line">
+            <a:avLst/>
+          </a:prstGeom>
+          <a:ln w="3600">
+            <a:solidFill>
+              <a:srgbClr val="2A2F38"/>
+            </a:solidFill>
+          </a:ln>
+        </p:spPr>
+      </p:cxnSp>
+      <p:sp>
+        <p:nvSpPr>
+          <p:cNvPr id="10" name="텍스트"/>
+          <p:cNvSpPr txBox="1"/>
+          <p:nvPr/>
+        </p:nvSpPr>
+        <p:spPr>
+          <a:xfrm>
+            <a:off x="1260000" y="1054800"/>
+            <a:ext cx="331200" cy="91441"/>
+          </a:xfrm>
+          <a:prstGeom prst="rect">
+            <a:avLst/>
+          </a:prstGeom>
+          <a:noFill/>
+        </p:spPr>
+        <p:txBody>
+          <a:bodyPr wrap="square" lIns="0" rIns="0" tIns="0" bIns="0" anchor="t">
+            <a:spAutoFit/>
+          </a:bodyPr>
+          <a:lstStyle/>
+          <a:p>
+            <a:pPr algn="l">
+              <a:lnSpc>
+                <a:spcPts val="696"/>
+              </a:lnSpc>
+            </a:pPr>
+            <a:r>
+              <a:rPr sz="480" b="1" spc="140">
                 <a:solidFill>
                   <a:srgbClr val="A3A9B5"/>
                 </a:solidFill>
@@ -3348,14 +3399,14 @@
       </p:sp>
       <p:sp>
         <p:nvSpPr>
-          <p:cNvPr id="9" name="텍스트"/>
+          <p:cNvPr id="11" name="텍스트"/>
           <p:cNvSpPr txBox="1"/>
           <p:nvPr/>
         </p:nvSpPr>
         <p:spPr>
           <a:xfrm>
-            <a:off x="2023200" y="1317600"/>
-            <a:ext cx="1188000" cy="125731"/>
+            <a:off x="1591200" y="1044000"/>
+            <a:ext cx="1188000" cy="123826"/>
           </a:xfrm>
           <a:prstGeom prst="rect">
             <a:avLst/>
@@ -3370,11 +3421,11 @@
           <a:p>
             <a:pPr algn="l">
               <a:lnSpc>
-                <a:spcPts val="956"/>
+                <a:spcPts val="942"/>
               </a:lnSpc>
             </a:pPr>
             <a:r>
-              <a:rPr sz="660" b="0">
+              <a:rPr sz="650" b="0">
                 <a:solidFill>
                   <a:srgbClr val="FFFFFF"/>
                 </a:solidFill>
@@ -3388,14 +3439,14 @@
       </p:sp>
       <p:sp>
         <p:nvSpPr>
-          <p:cNvPr id="10" name="텍스트"/>
+          <p:cNvPr id="12" name="텍스트"/>
           <p:cNvSpPr txBox="1"/>
           <p:nvPr/>
         </p:nvSpPr>
         <p:spPr>
           <a:xfrm>
-            <a:off x="1692000" y="1458000"/>
-            <a:ext cx="331200" cy="99061"/>
+            <a:off x="1260000" y="1184400"/>
+            <a:ext cx="331200" cy="91441"/>
           </a:xfrm>
           <a:prstGeom prst="rect">
             <a:avLst/>
@@ -3410,11 +3461,11 @@
           <a:p>
             <a:pPr algn="l">
               <a:lnSpc>
-                <a:spcPts val="754"/>
+                <a:spcPts val="696"/>
               </a:lnSpc>
             </a:pPr>
             <a:r>
-              <a:rPr sz="520" b="1" spc="120">
+              <a:rPr sz="480" b="1" spc="140">
                 <a:solidFill>
                   <a:srgbClr val="A3A9B5"/>
                 </a:solidFill>
@@ -3428,14 +3479,14 @@
       </p:sp>
       <p:sp>
         <p:nvSpPr>
-          <p:cNvPr id="11" name="텍스트"/>
+          <p:cNvPr id="13" name="텍스트"/>
           <p:cNvSpPr txBox="1"/>
           <p:nvPr/>
         </p:nvSpPr>
         <p:spPr>
           <a:xfrm>
-            <a:off x="2023200" y="1447200"/>
-            <a:ext cx="1188000" cy="125731"/>
+            <a:off x="1591200" y="1173600"/>
+            <a:ext cx="1188000" cy="123826"/>
           </a:xfrm>
           <a:prstGeom prst="rect">
             <a:avLst/>
@@ -3450,11 +3501,11 @@
           <a:p>
             <a:pPr algn="l">
               <a:lnSpc>
-                <a:spcPts val="956"/>
+                <a:spcPts val="942"/>
               </a:lnSpc>
             </a:pPr>
             <a:r>
-              <a:rPr sz="660" b="0">
+              <a:rPr sz="650" b="0">
                 <a:solidFill>
                   <a:srgbClr val="FFFFFF"/>
                 </a:solidFill>
@@ -3468,14 +3519,14 @@
       </p:sp>
       <p:sp>
         <p:nvSpPr>
-          <p:cNvPr id="12" name="텍스트"/>
+          <p:cNvPr id="14" name="텍스트"/>
           <p:cNvSpPr txBox="1"/>
           <p:nvPr/>
         </p:nvSpPr>
         <p:spPr>
           <a:xfrm>
-            <a:off x="1692000" y="1587600"/>
-            <a:ext cx="331200" cy="99061"/>
+            <a:off x="1260000" y="1314000"/>
+            <a:ext cx="331200" cy="91441"/>
           </a:xfrm>
           <a:prstGeom prst="rect">
             <a:avLst/>
@@ -3490,11 +3541,11 @@
           <a:p>
             <a:pPr algn="l">
               <a:lnSpc>
-                <a:spcPts val="754"/>
+                <a:spcPts val="696"/>
               </a:lnSpc>
             </a:pPr>
             <a:r>
-              <a:rPr sz="520" b="1" spc="120">
+              <a:rPr sz="480" b="1" spc="140">
                 <a:solidFill>
                   <a:srgbClr val="A3A9B5"/>
                 </a:solidFill>
@@ -3508,14 +3559,14 @@
       </p:sp>
       <p:sp>
         <p:nvSpPr>
-          <p:cNvPr id="13" name="텍스트"/>
+          <p:cNvPr id="15" name="텍스트"/>
           <p:cNvSpPr txBox="1"/>
           <p:nvPr/>
         </p:nvSpPr>
         <p:spPr>
           <a:xfrm>
-            <a:off x="2023200" y="1576800"/>
-            <a:ext cx="1188000" cy="125731"/>
+            <a:off x="1591200" y="1303200"/>
+            <a:ext cx="1188000" cy="123826"/>
           </a:xfrm>
           <a:prstGeom prst="rect">
             <a:avLst/>
@@ -3530,11 +3581,11 @@
           <a:p>
             <a:pPr algn="l">
               <a:lnSpc>
-                <a:spcPts val="956"/>
+                <a:spcPts val="942"/>
               </a:lnSpc>
             </a:pPr>
             <a:r>
-              <a:rPr sz="660" b="0">
+              <a:rPr sz="650" b="0">
                 <a:solidFill>
                   <a:srgbClr val="FFFFFF"/>
                 </a:solidFill>
@@ -3574,54 +3625,74 @@
       <p:grpSpPr/>
       <p:sp>
         <p:nvSpPr>
-          <p:cNvPr id="2" name="텍스트"/>
-          <p:cNvSpPr txBox="1"/>
+          <p:cNvPr id="2" name="Rectangle 1"/>
+          <p:cNvSpPr/>
           <p:nvPr/>
         </p:nvSpPr>
         <p:spPr>
           <a:xfrm>
-            <a:off x="216000" y="72000"/>
-            <a:ext cx="1080000" cy="936000"/>
+            <a:off x="0" y="0"/>
+            <a:ext cx="3240000" cy="1800000"/>
+          </a:xfrm>
+          <a:prstGeom prst="rect">
+            <a:avLst/>
+          </a:prstGeom>
+          <a:solidFill>
+            <a:srgbClr val="00A6A6"/>
+          </a:solidFill>
+          <a:ln>
+            <a:noFill/>
+          </a:ln>
+        </p:spPr>
+        <p:txBody>
+          <a:bodyPr rtlCol="0" anchor="ctr"/>
+          <a:lstStyle/>
+          <a:p>
+            <a:pPr algn="ctr"/>
+          </a:p>
+        </p:txBody>
+      </p:sp>
+      <p:sp>
+        <p:nvSpPr>
+          <p:cNvPr id="3" name="Rectangle 2"/>
+          <p:cNvSpPr/>
+          <p:nvPr/>
+        </p:nvSpPr>
+        <p:spPr>
+          <a:xfrm>
+            <a:off x="108000" y="108000"/>
+            <a:ext cx="3024000" cy="1584000"/>
           </a:xfrm>
           <a:prstGeom prst="rect">
             <a:avLst/>
           </a:prstGeom>
           <a:noFill/>
-        </p:spPr>
-        <p:txBody>
-          <a:bodyPr wrap="square" lIns="0" rIns="0" tIns="0" bIns="0" anchor="t">
-            <a:spAutoFit/>
-          </a:bodyPr>
-          <a:lstStyle/>
-          <a:p>
-            <a:pPr algn="l">
-              <a:lnSpc>
-                <a:spcPts val="15950"/>
-              </a:lnSpc>
-            </a:pPr>
-            <a:r>
-              <a:rPr sz="11000" b="1">
-                <a:solidFill>
-                  <a:srgbClr val="00A6A6"/>
-                </a:solidFill>
-                <a:latin typeface="맑은 고딕"/>
-                <a:ea typeface="맑은 고딕"/>
-              </a:rPr>
-              <a:t>“</a:t>
-            </a:r>
-          </a:p>
-        </p:txBody>
-      </p:sp>
-      <p:sp>
-        <p:nvSpPr>
-          <p:cNvPr id="3" name="텍스트"/>
+          <a:ln w="3600">
+            <a:solidFill>
+              <a:srgbClr val="12151C">
+                <a:alpha val="50000"/>
+              </a:srgbClr>
+            </a:solidFill>
+          </a:ln>
+        </p:spPr>
+        <p:txBody>
+          <a:bodyPr rtlCol="0" anchor="ctr"/>
+          <a:lstStyle/>
+          <a:p>
+            <a:pPr algn="ctr"/>
+          </a:p>
+        </p:txBody>
+      </p:sp>
+      <p:sp>
+        <p:nvSpPr>
+          <p:cNvPr id="4" name="텍스트"/>
           <p:cNvSpPr txBox="1"/>
           <p:nvPr/>
         </p:nvSpPr>
         <p:spPr>
           <a:xfrm>
-            <a:off x="252000" y="792000"/>
-            <a:ext cx="2520000" cy="648000"/>
+            <a:off x="288000" y="280800"/>
+            <a:ext cx="1440000" cy="99061"/>
           </a:xfrm>
           <a:prstGeom prst="rect">
             <a:avLst/>
@@ -3636,43 +3707,22 @@
           <a:p>
             <a:pPr algn="l">
               <a:lnSpc>
-                <a:spcPts val="1812"/>
+                <a:spcPts val="754"/>
               </a:lnSpc>
             </a:pPr>
             <a:r>
-              <a:rPr sz="1250" b="1">
+              <a:rPr sz="520" b="1" spc="240">
                 <a:solidFill>
                   <a:srgbClr val="12151C"/>
                 </a:solidFill>
                 <a:latin typeface="맑은 고딕"/>
                 <a:ea typeface="맑은 고딕"/>
               </a:rPr>
-              <a:t>함께 걷는 건강한 길</a:t>
-            </a:r>
-          </a:p>
-        </p:txBody>
-      </p:sp>
-      <p:cxnSp>
-        <p:nvCxnSpPr>
-          <p:cNvPr id="4" name="Connector 3"/>
-          <p:cNvCxnSpPr/>
-          <p:nvPr/>
-        </p:nvCxnSpPr>
-        <p:spPr>
-          <a:xfrm>
-            <a:off x="252000" y="1512000"/>
-            <a:ext cx="2736000" cy="0"/>
-          </a:xfrm>
-          <a:prstGeom prst="line">
-            <a:avLst/>
-          </a:prstGeom>
-          <a:ln w="5760">
-            <a:solidFill>
-              <a:srgbClr val="DCDFE4"/>
-            </a:solidFill>
-          </a:ln>
-        </p:spPr>
-      </p:cxnSp>
+              <a:t>진료 · 상담</a:t>
+            </a:r>
+          </a:p>
+        </p:txBody>
+      </p:sp>
       <p:sp>
         <p:nvSpPr>
           <p:cNvPr id="5" name="텍스트"/>
@@ -3681,8 +3731,8 @@
         </p:nvSpPr>
         <p:spPr>
           <a:xfrm>
-            <a:off x="252000" y="1569600"/>
-            <a:ext cx="2736000" cy="123826"/>
+            <a:off x="288000" y="468000"/>
+            <a:ext cx="1872000" cy="216000"/>
           </a:xfrm>
           <a:prstGeom prst="rect">
             <a:avLst/>
@@ -3695,15 +3745,362 @@
           </a:bodyPr>
           <a:lstStyle/>
           <a:p>
-            <a:pPr algn="r">
+            <a:pPr algn="l">
+              <a:lnSpc>
+                <a:spcPts val="1377"/>
+              </a:lnSpc>
+            </a:pPr>
+            <a:r>
+              <a:rPr sz="950" b="1">
+                <a:solidFill>
+                  <a:srgbClr val="12151C"/>
+                </a:solidFill>
+                <a:latin typeface="맑은 고딕"/>
+                <a:ea typeface="맑은 고딕"/>
+              </a:rPr>
+              <a:t>한방 치료</a:t>
+            </a:r>
+          </a:p>
+        </p:txBody>
+      </p:sp>
+      <p:cxnSp>
+        <p:nvCxnSpPr>
+          <p:cNvPr id="6" name="Connector 5"/>
+          <p:cNvCxnSpPr/>
+          <p:nvPr/>
+        </p:nvCxnSpPr>
+        <p:spPr>
+          <a:xfrm>
+            <a:off x="288000" y="669600"/>
+            <a:ext cx="1728000" cy="0"/>
+          </a:xfrm>
+          <a:prstGeom prst="line">
+            <a:avLst/>
+          </a:prstGeom>
+          <a:ln w="3600">
+            <a:solidFill>
+              <a:srgbClr val="12151C"/>
+            </a:solidFill>
+          </a:ln>
+        </p:spPr>
+      </p:cxnSp>
+      <p:sp>
+        <p:nvSpPr>
+          <p:cNvPr id="7" name="텍스트"/>
+          <p:cNvSpPr txBox="1"/>
+          <p:nvPr/>
+        </p:nvSpPr>
+        <p:spPr>
+          <a:xfrm>
+            <a:off x="288000" y="691200"/>
+            <a:ext cx="1872000" cy="216000"/>
+          </a:xfrm>
+          <a:prstGeom prst="rect">
+            <a:avLst/>
+          </a:prstGeom>
+          <a:noFill/>
+        </p:spPr>
+        <p:txBody>
+          <a:bodyPr wrap="square" lIns="0" rIns="0" tIns="0" bIns="0" anchor="t">
+            <a:spAutoFit/>
+          </a:bodyPr>
+          <a:lstStyle/>
+          <a:p>
+            <a:pPr algn="l">
+              <a:lnSpc>
+                <a:spcPts val="1377"/>
+              </a:lnSpc>
+            </a:pPr>
+            <a:r>
+              <a:rPr sz="950" b="1">
+                <a:solidFill>
+                  <a:srgbClr val="12151C"/>
+                </a:solidFill>
+                <a:latin typeface="맑은 고딕"/>
+                <a:ea typeface="맑은 고딕"/>
+              </a:rPr>
+              <a:t>복약 상담</a:t>
+            </a:r>
+          </a:p>
+        </p:txBody>
+      </p:sp>
+      <p:cxnSp>
+        <p:nvCxnSpPr>
+          <p:cNvPr id="8" name="Connector 7"/>
+          <p:cNvCxnSpPr/>
+          <p:nvPr/>
+        </p:nvCxnSpPr>
+        <p:spPr>
+          <a:xfrm>
+            <a:off x="288000" y="892800"/>
+            <a:ext cx="1728000" cy="0"/>
+          </a:xfrm>
+          <a:prstGeom prst="line">
+            <a:avLst/>
+          </a:prstGeom>
+          <a:ln w="3600">
+            <a:solidFill>
+              <a:srgbClr val="12151C"/>
+            </a:solidFill>
+          </a:ln>
+        </p:spPr>
+      </p:cxnSp>
+      <p:sp>
+        <p:nvSpPr>
+          <p:cNvPr id="9" name="텍스트"/>
+          <p:cNvSpPr txBox="1"/>
+          <p:nvPr/>
+        </p:nvSpPr>
+        <p:spPr>
+          <a:xfrm>
+            <a:off x="288000" y="914400"/>
+            <a:ext cx="1872000" cy="216000"/>
+          </a:xfrm>
+          <a:prstGeom prst="rect">
+            <a:avLst/>
+          </a:prstGeom>
+          <a:noFill/>
+        </p:spPr>
+        <p:txBody>
+          <a:bodyPr wrap="square" lIns="0" rIns="0" tIns="0" bIns="0" anchor="t">
+            <a:spAutoFit/>
+          </a:bodyPr>
+          <a:lstStyle/>
+          <a:p>
+            <a:pPr algn="l">
+              <a:lnSpc>
+                <a:spcPts val="1377"/>
+              </a:lnSpc>
+            </a:pPr>
+            <a:r>
+              <a:rPr sz="950" b="1">
+                <a:solidFill>
+                  <a:srgbClr val="12151C"/>
+                </a:solidFill>
+                <a:latin typeface="맑은 고딕"/>
+                <a:ea typeface="맑은 고딕"/>
+              </a:rPr>
+              <a:t>건강 상담</a:t>
+            </a:r>
+          </a:p>
+        </p:txBody>
+      </p:sp>
+      <p:cxnSp>
+        <p:nvCxnSpPr>
+          <p:cNvPr id="10" name="Connector 9"/>
+          <p:cNvCxnSpPr/>
+          <p:nvPr/>
+        </p:nvCxnSpPr>
+        <p:spPr>
+          <a:xfrm>
+            <a:off x="288000" y="1116000"/>
+            <a:ext cx="1728000" cy="0"/>
+          </a:xfrm>
+          <a:prstGeom prst="line">
+            <a:avLst/>
+          </a:prstGeom>
+          <a:ln w="3600">
+            <a:solidFill>
+              <a:srgbClr val="12151C"/>
+            </a:solidFill>
+          </a:ln>
+        </p:spPr>
+      </p:cxnSp>
+      <p:sp>
+        <p:nvSpPr>
+          <p:cNvPr id="11" name="텍스트"/>
+          <p:cNvSpPr txBox="1"/>
+          <p:nvPr/>
+        </p:nvSpPr>
+        <p:spPr>
+          <a:xfrm>
+            <a:off x="2268000" y="468000"/>
+            <a:ext cx="864000" cy="91441"/>
+          </a:xfrm>
+          <a:prstGeom prst="rect">
+            <a:avLst/>
+          </a:prstGeom>
+          <a:noFill/>
+        </p:spPr>
+        <p:txBody>
+          <a:bodyPr wrap="square" lIns="0" rIns="0" tIns="0" bIns="0" anchor="t">
+            <a:spAutoFit/>
+          </a:bodyPr>
+          <a:lstStyle/>
+          <a:p>
+            <a:pPr algn="l">
+              <a:lnSpc>
+                <a:spcPts val="696"/>
+              </a:lnSpc>
+            </a:pPr>
+            <a:r>
+              <a:rPr sz="480" b="1" spc="140">
+                <a:solidFill>
+                  <a:srgbClr val="12151C">
+                    <a:alpha val="75000"/>
+                  </a:srgbClr>
+                </a:solidFill>
+                <a:latin typeface="맑은 고딕"/>
+                <a:ea typeface="맑은 고딕"/>
+              </a:rPr>
+              <a:t>HOURS</a:t>
+            </a:r>
+          </a:p>
+        </p:txBody>
+      </p:sp>
+      <p:sp>
+        <p:nvSpPr>
+          <p:cNvPr id="12" name="텍스트"/>
+          <p:cNvSpPr txBox="1"/>
+          <p:nvPr/>
+        </p:nvSpPr>
+        <p:spPr>
+          <a:xfrm>
+            <a:off x="2268000" y="576000"/>
+            <a:ext cx="864000" cy="118111"/>
+          </a:xfrm>
+          <a:prstGeom prst="rect">
+            <a:avLst/>
+          </a:prstGeom>
+          <a:noFill/>
+        </p:spPr>
+        <p:txBody>
+          <a:bodyPr wrap="square" lIns="0" rIns="0" tIns="0" bIns="0" anchor="t">
+            <a:spAutoFit/>
+          </a:bodyPr>
+          <a:lstStyle/>
+          <a:p>
+            <a:pPr algn="l">
+              <a:lnSpc>
+                <a:spcPts val="899"/>
+              </a:lnSpc>
+            </a:pPr>
+            <a:r>
+              <a:rPr sz="620" b="1">
+                <a:solidFill>
+                  <a:srgbClr val="12151C"/>
+                </a:solidFill>
+                <a:latin typeface="맑은 고딕"/>
+                <a:ea typeface="맑은 고딕"/>
+              </a:rPr>
+              <a:t>평일 09:00 – 18:00</a:t>
+            </a:r>
+          </a:p>
+        </p:txBody>
+      </p:sp>
+      <p:sp>
+        <p:nvSpPr>
+          <p:cNvPr id="13" name="텍스트"/>
+          <p:cNvSpPr txBox="1"/>
+          <p:nvPr/>
+        </p:nvSpPr>
+        <p:spPr>
+          <a:xfrm>
+            <a:off x="2268000" y="900000"/>
+            <a:ext cx="864000" cy="91441"/>
+          </a:xfrm>
+          <a:prstGeom prst="rect">
+            <a:avLst/>
+          </a:prstGeom>
+          <a:noFill/>
+        </p:spPr>
+        <p:txBody>
+          <a:bodyPr wrap="square" lIns="0" rIns="0" tIns="0" bIns="0" anchor="t">
+            <a:spAutoFit/>
+          </a:bodyPr>
+          <a:lstStyle/>
+          <a:p>
+            <a:pPr algn="l">
+              <a:lnSpc>
+                <a:spcPts val="696"/>
+              </a:lnSpc>
+            </a:pPr>
+            <a:r>
+              <a:rPr sz="480" b="1" spc="140">
+                <a:solidFill>
+                  <a:srgbClr val="12151C">
+                    <a:alpha val="75000"/>
+                  </a:srgbClr>
+                </a:solidFill>
+                <a:latin typeface="맑은 고딕"/>
+                <a:ea typeface="맑은 고딕"/>
+              </a:rPr>
+              <a:t>INSTAGRAM</a:t>
+            </a:r>
+          </a:p>
+        </p:txBody>
+      </p:sp>
+      <p:sp>
+        <p:nvSpPr>
+          <p:cNvPr id="14" name="텍스트"/>
+          <p:cNvSpPr txBox="1"/>
+          <p:nvPr/>
+        </p:nvSpPr>
+        <p:spPr>
+          <a:xfrm>
+            <a:off x="2268000" y="1008000"/>
+            <a:ext cx="864000" cy="118111"/>
+          </a:xfrm>
+          <a:prstGeom prst="rect">
+            <a:avLst/>
+          </a:prstGeom>
+          <a:noFill/>
+        </p:spPr>
+        <p:txBody>
+          <a:bodyPr wrap="square" lIns="0" rIns="0" tIns="0" bIns="0" anchor="t">
+            <a:spAutoFit/>
+          </a:bodyPr>
+          <a:lstStyle/>
+          <a:p>
+            <a:pPr algn="l">
+              <a:lnSpc>
+                <a:spcPts val="899"/>
+              </a:lnSpc>
+            </a:pPr>
+            <a:r>
+              <a:rPr sz="620" b="1">
+                <a:solidFill>
+                  <a:srgbClr val="12151C"/>
+                </a:solidFill>
+                <a:latin typeface="맑은 고딕"/>
+                <a:ea typeface="맑은 고딕"/>
+              </a:rPr>
+              <a:t>@아이디</a:t>
+            </a:r>
+          </a:p>
+        </p:txBody>
+      </p:sp>
+      <p:sp>
+        <p:nvSpPr>
+          <p:cNvPr id="15" name="텍스트"/>
+          <p:cNvSpPr txBox="1"/>
+          <p:nvPr/>
+        </p:nvSpPr>
+        <p:spPr>
+          <a:xfrm>
+            <a:off x="288000" y="1512000"/>
+            <a:ext cx="1800000" cy="123826"/>
+          </a:xfrm>
+          <a:prstGeom prst="rect">
+            <a:avLst/>
+          </a:prstGeom>
+          <a:noFill/>
+        </p:spPr>
+        <p:txBody>
+          <a:bodyPr wrap="square" lIns="0" rIns="0" tIns="0" bIns="0" anchor="t">
+            <a:spAutoFit/>
+          </a:bodyPr>
+          <a:lstStyle/>
+          <a:p>
+            <a:pPr algn="l">
               <a:lnSpc>
                 <a:spcPts val="942"/>
               </a:lnSpc>
             </a:pPr>
             <a:r>
-              <a:rPr sz="650" b="1" spc="200">
+              <a:rPr sz="650" b="1" spc="220">
                 <a:solidFill>
-                  <a:srgbClr val="6B7280"/>
+                  <a:srgbClr val="12151C"/>
                 </a:solidFill>
                 <a:latin typeface="맑은 고딕"/>
                 <a:ea typeface="맑은 고딕"/>
